--- a/docs/slides/nankai/nankai_east_survive_vs_collapse_v1_2026-09-16.pptx
+++ b/docs/slides/nankai/nankai_east_survive_vs_collapse_v1_2026-09-16.pptx
@@ -660,7 +660,7 @@
           <a:lstStyle/>
           <a:p>
             <a:r>
-              <a:t>揺れで火力 21.6 GW(需要の 39%)が止まる。UFLS 2 段 14.0 GW でも足りず、45.2 Hz まで落ちて水力・火力の周波数低下保護が 6.0 GW を解列、127 秒で 34 GW が崩壊する。200 サンプルのうち全域崩壊は 20 で、揺れの直後に崩れる型が 2、津波の後に崩れる型が 18。</a:t>
+              <a:t>揺れで火力 21.6 GW(需要の 39%)が止まる。UFLS 2 段 14.0 GW でも足りず、45.2 Hz まで落ちて水力・火力の周波数低下保護が 6.0 GW を解列、127 秒で 34 GW が崩壊する。200 サンプルのうち全域崩壊は 20 で、揺れの直後(5 分以内)に崩れる型が 3、後で崩れる型が 17。</a:t>
             </a:r>
           </a:p>
           <a:p/>
@@ -8193,7 +8193,7 @@
                 <a:ea typeface="Hiragino Sans"/>
                 <a:cs typeface="Hiragino Sans"/>
               </a:rPr>
-              <a:t>✓  津波後の崩壊は鹿島の系統の切り離しが引き金(20 例中 18 例がこの型)</a:t>
+              <a:t>✓  後で崩れる 17 例のうち 11 例は鹿島の切り離し(4.9〜5.1 GW)が直前の引き金</a:t>
             </a:r>
           </a:p>
           <a:p>
